--- a/media/exports/reports/2026-06/volunteers.pptx
+++ b/media/exports/reports/2026-06/volunteers.pptx
@@ -197,22 +197,22 @@
               <c:strCache>
                 <c:ptCount val="6"/>
                 <c:pt idx="0">
+                  <c:v>Volunteer coordinator</c:v>
+                </c:pt>
+                <c:pt idx="1">
+                  <c:v>Digital literacy</c:v>
+                </c:pt>
+                <c:pt idx="2">
+                  <c:v>Housing support</c:v>
+                </c:pt>
+                <c:pt idx="3">
+                  <c:v>Mental health first aid</c:v>
+                </c:pt>
+                <c:pt idx="4">
                   <c:v>Community meals</c:v>
                 </c:pt>
-                <c:pt idx="1">
+                <c:pt idx="5">
                   <c:v>Youth outreach</c:v>
-                </c:pt>
-                <c:pt idx="2">
-                  <c:v>Mental health first aid</c:v>
-                </c:pt>
-                <c:pt idx="3">
-                  <c:v>Volunteer coordinator</c:v>
-                </c:pt>
-                <c:pt idx="4">
-                  <c:v>Digital literacy</c:v>
-                </c:pt>
-                <c:pt idx="5">
-                  <c:v>Housing support</c:v>
                 </c:pt>
               </c:strCache>
             </c:strRef>
@@ -224,22 +224,22 @@
                 <c:formatCode>#,##0;[Red](#,##0)</c:formatCode>
                 <c:ptCount val="6"/>
                 <c:pt idx="0">
-                  <c:v>103.5</c:v>
+                  <c:v>71.0</c:v>
                 </c:pt>
                 <c:pt idx="1">
-                  <c:v>112.0</c:v>
+                  <c:v>132.5</c:v>
                 </c:pt>
                 <c:pt idx="2">
-                  <c:v>123.0</c:v>
+                  <c:v>137.5</c:v>
                 </c:pt>
                 <c:pt idx="3">
-                  <c:v>134.0</c:v>
+                  <c:v>166.5</c:v>
                 </c:pt>
                 <c:pt idx="4">
-                  <c:v>172.5</c:v>
+                  <c:v>184.0</c:v>
                 </c:pt>
                 <c:pt idx="5">
-                  <c:v>174.0</c:v>
+                  <c:v>187.0</c:v>
                 </c:pt>
               </c:numCache>
             </c:numRef>
@@ -303,7 +303,7 @@
       <c:valAx>
         <c:axId val="-2113994440"/>
         <c:scaling>
-          <c:max val="200.1"/>
+          <c:max val="215.04999999999998"/>
           <c:min val="0.0"/>
         </c:scaling>
         <c:delete/>
@@ -460,67 +460,67 @@
                 <c:formatCode>#,##0;[Red](#,##0)</c:formatCode>
                 <c:ptCount val="21"/>
                 <c:pt idx="0">
-                  <c:v>317.5</c:v>
+                  <c:v>381.0</c:v>
                 </c:pt>
                 <c:pt idx="1">
-                  <c:v>392.0</c:v>
+                  <c:v>373.5</c:v>
                 </c:pt>
                 <c:pt idx="2">
-                  <c:v>363.5</c:v>
+                  <c:v>383.5</c:v>
                 </c:pt>
                 <c:pt idx="3">
-                  <c:v>399.0</c:v>
+                  <c:v>387.5</c:v>
                 </c:pt>
                 <c:pt idx="4">
-                  <c:v>422.0</c:v>
+                  <c:v>376.5</c:v>
                 </c:pt>
                 <c:pt idx="5">
-                  <c:v>451.5</c:v>
+                  <c:v>444.0</c:v>
                 </c:pt>
                 <c:pt idx="6">
-                  <c:v>445.0</c:v>
+                  <c:v>422.5</c:v>
                 </c:pt>
                 <c:pt idx="7">
-                  <c:v>513.0</c:v>
+                  <c:v>562.0</c:v>
                 </c:pt>
                 <c:pt idx="8">
-                  <c:v>529.0</c:v>
+                  <c:v>568.0</c:v>
                 </c:pt>
                 <c:pt idx="9">
-                  <c:v>586.0</c:v>
+                  <c:v>609.5</c:v>
                 </c:pt>
                 <c:pt idx="10">
-                  <c:v>560.5</c:v>
+                  <c:v>627.0</c:v>
                 </c:pt>
                 <c:pt idx="11">
-                  <c:v>625.5</c:v>
+                  <c:v>708.5</c:v>
                 </c:pt>
                 <c:pt idx="12">
-                  <c:v>669.5</c:v>
+                  <c:v>817.0</c:v>
                 </c:pt>
                 <c:pt idx="13">
-                  <c:v>626.5</c:v>
+                  <c:v>780.5</c:v>
                 </c:pt>
                 <c:pt idx="14">
-                  <c:v>683.0</c:v>
+                  <c:v>830.5</c:v>
                 </c:pt>
                 <c:pt idx="15">
-                  <c:v>711.5</c:v>
+                  <c:v>817.5</c:v>
                 </c:pt>
                 <c:pt idx="16">
-                  <c:v>700.0</c:v>
+                  <c:v>781.0</c:v>
                 </c:pt>
                 <c:pt idx="17">
-                  <c:v>772.0</c:v>
+                  <c:v>870.0</c:v>
                 </c:pt>
                 <c:pt idx="18">
-                  <c:v>794.5</c:v>
+                  <c:v>816.0</c:v>
                 </c:pt>
                 <c:pt idx="19">
-                  <c:v>811.0</c:v>
+                  <c:v>830.5</c:v>
                 </c:pt>
                 <c:pt idx="20">
-                  <c:v>819.0</c:v>
+                  <c:v>878.5</c:v>
                 </c:pt>
               </c:numCache>
             </c:numRef>
@@ -1094,7 +1094,7 @@
           <a:lstStyle/>
           <a:p>
             <a:r>
-              <a:t>How many volunteer hours go into each program?. Volunteer hours, June: 819.0 h; Volunteers who did a shift, June: 58; Hours per volunteer, June: 14.1 h; June last year: 529.0 h. 58 volunteers gave 819.0 h in June, against 811.0 h in May. Housing support drew the most (174.0 h, 21.2%). Community meals had the fewest volunteer hours (103.5 h). Hours are up 54.8% on June last year.</a:t>
+              <a:t>How many volunteer hours go into each program?. Volunteer hours, June: 878.5 h; Volunteers who did a shift, June: 60; Hours per volunteer, June: 14.6 h; June last year: 568.0 h. 60 volunteers gave 878.5 h in June, against 830.5 h in May. Youth outreach drew the most (187.0 h, 21.3%). Volunteer coordinator had the fewest volunteer hours (71.0 h). Hours are up 54.7% on June last year.</a:t>
             </a:r>
           </a:p>
         </p:txBody>
@@ -4579,7 +4579,7 @@
                 </a:solidFill>
                 <a:latin typeface="Roboto"/>
               </a:rPr>
-              <a:t>Data retrieved 2pm, Tue 6 Oct 2026 · Generated 8 Oct 2026, 6:29pm · Sample data · Made with Python (python-pptx)</a:t>
+              <a:t>Data retrieved 2pm, Tue 6 Oct 2026 · Generated 8 Oct 2026, 11:41pm · Sample data · Made with Python (python-pptx)</a:t>
             </a:r>
           </a:p>
         </p:txBody>
@@ -4925,7 +4925,7 @@
                 </a:solidFill>
                 <a:latin typeface="Roboto"/>
               </a:rPr>
-              <a:t>819.0 h</a:t>
+              <a:t>878.5 h</a:t>
             </a:r>
           </a:p>
         </p:txBody>
@@ -4964,7 +4964,7 @@
                 </a:solidFill>
                 <a:latin typeface="Roboto"/>
               </a:rPr>
-              <a:t>May 811.0 h</a:t>
+              <a:t>May 830.5 h</a:t>
             </a:r>
           </a:p>
         </p:txBody>
@@ -5091,7 +5091,7 @@
                 </a:solidFill>
                 <a:latin typeface="Roboto"/>
               </a:rPr>
-              <a:t>58</a:t>
+              <a:t>60</a:t>
             </a:r>
           </a:p>
         </p:txBody>
@@ -5130,7 +5130,7 @@
                 </a:solidFill>
                 <a:latin typeface="Roboto"/>
               </a:rPr>
-              <a:t>May 55</a:t>
+              <a:t>May 59</a:t>
             </a:r>
           </a:p>
         </p:txBody>
@@ -5257,7 +5257,7 @@
                 </a:solidFill>
                 <a:latin typeface="Roboto"/>
               </a:rPr>
-              <a:t>14.1 h</a:t>
+              <a:t>14.6 h</a:t>
             </a:r>
           </a:p>
         </p:txBody>
@@ -5423,7 +5423,7 @@
                 </a:solidFill>
                 <a:latin typeface="Roboto"/>
               </a:rPr>
-              <a:t>529.0 h</a:t>
+              <a:t>568.0 h</a:t>
             </a:r>
           </a:p>
         </p:txBody>
@@ -5462,7 +5462,7 @@
                 </a:solidFill>
                 <a:latin typeface="Roboto"/>
               </a:rPr>
-              <a:t>36 volunteers</a:t>
+              <a:t>40 volunteers</a:t>
             </a:r>
           </a:p>
         </p:txBody>
@@ -5607,7 +5607,7 @@
                 </a:solidFill>
                 <a:latin typeface="Roboto"/>
               </a:rPr>
-              <a:t>58 volunteers gave 819.0 h in June, against 811.0 h in May. Housing support drew the most (174.0 h, 21.2%).</a:t>
+              <a:t>60 volunteers gave 878.5 h in June, against 830.5 h in May. Youth outreach drew the most (187.0 h, 21.3%).</a:t>
             </a:r>
           </a:p>
         </p:txBody>
@@ -5734,7 +5734,7 @@
                 </a:solidFill>
                 <a:latin typeface="Roboto"/>
               </a:rPr>
-              <a:t>Community meals had the fewest volunteer hours (103.5 h). Hours are up 54.8% on June last year.</a:t>
+              <a:t>Volunteer coordinator had the fewest volunteer hours (71.0 h). Hours are up 54.7% on June last year.</a:t>
             </a:r>
           </a:p>
         </p:txBody>
@@ -5812,7 +5812,7 @@
                 </a:solidFill>
                 <a:latin typeface="Roboto"/>
               </a:rPr>
-              <a:t>Data retrieved 2pm, Tue 6 Oct 2026 · Generated 8 Oct 2026, 6:29pm · Sample data · Made with Python (python-pptx)</a:t>
+              <a:t>Data retrieved 2pm, Tue 6 Oct 2026 · Generated 8 Oct 2026, 11:41pm · Sample data · Made with Python (python-pptx)</a:t>
             </a:r>
           </a:p>
         </p:txBody>
@@ -6127,7 +6127,7 @@
                 </a:solidFill>
                 <a:latin typeface="Roboto"/>
               </a:rPr>
-              <a:t>Data retrieved 2pm, Tue 6 Oct 2026 · Generated 8 Oct 2026, 6:29pm · Sample data · Made with Python (python-pptx)</a:t>
+              <a:t>Data retrieved 2pm, Tue 6 Oct 2026 · Generated 8 Oct 2026, 11:41pm · Sample data · Made with Python (python-pptx)</a:t>
             </a:r>
           </a:p>
         </p:txBody>

--- a/media/exports/reports/2026-06/volunteers.pptx
+++ b/media/exports/reports/2026-06/volunteers.pptx
@@ -1024,7 +1024,7 @@
           <a:lstStyle/>
           <a:p>
             <a:r>
-              <a:t>How many volunteer hours go into each program?. Sample Community Services Ltd. Period: June 2026. Every volunteer shift: who (a code, not a name), which program, and how many hours.</a:t>
+              <a:t>How many volunteer hours go into each program?. Sample Community Services Ltd. Period: June 2026. In short: 878.5 h of volunteer time in June, from 60 volunteers; most went to Youth outreach. Every volunteer shift: who (a code, not a name), which program, and how many hours.</a:t>
             </a:r>
           </a:p>
         </p:txBody>
@@ -4389,7 +4389,7 @@
         <p:spPr>
           <a:xfrm>
             <a:off x="457200" y="3703320"/>
-            <a:ext cx="11277295" cy="313690"/>
+            <a:ext cx="11277295" cy="535940"/>
           </a:xfrm>
           <a:prstGeom prst="rect">
             <a:avLst/>
@@ -4414,7 +4414,7 @@
                 </a:solidFill>
                 <a:latin typeface="Roboto"/>
               </a:rPr>
-              <a:t>Period: June 2026. Every volunteer shift: who (a code, not a name), which program, and how many hours.</a:t>
+              <a:t>Period: June 2026. In short: 878.5 h of volunteer time in June, from 60 volunteers; most went to Youth outreach. Every volunteer shift: who (a code, not a name), which program, and how many hours.</a:t>
             </a:r>
           </a:p>
         </p:txBody>
@@ -4427,7 +4427,7 @@
         </p:nvSpPr>
         <p:spPr>
           <a:xfrm>
-            <a:off x="457200" y="4108450"/>
+            <a:off x="457200" y="4330700"/>
             <a:ext cx="11277295" cy="1097280"/>
           </a:xfrm>
           <a:prstGeom prst="rect">
@@ -4579,7 +4579,7 @@
                 </a:solidFill>
                 <a:latin typeface="Roboto"/>
               </a:rPr>
-              <a:t>Data retrieved 2pm, Tue 6 Oct 2026 · Generated 8 Oct 2026, 11:41pm · Sample data · Made with Python (python-pptx)</a:t>
+              <a:t>Data retrieved 2pm, Tue 6 Oct 2026 · Generated 10 Oct 2026, 9:55pm · Sample data · Made with Python (python-pptx)</a:t>
             </a:r>
           </a:p>
         </p:txBody>
@@ -5812,7 +5812,7 @@
                 </a:solidFill>
                 <a:latin typeface="Roboto"/>
               </a:rPr>
-              <a:t>Data retrieved 2pm, Tue 6 Oct 2026 · Generated 8 Oct 2026, 11:41pm · Sample data · Made with Python (python-pptx)</a:t>
+              <a:t>Data retrieved 2pm, Tue 6 Oct 2026 · Generated 10 Oct 2026, 9:55pm · Sample data · Made with Python (python-pptx)</a:t>
             </a:r>
           </a:p>
         </p:txBody>
@@ -6127,7 +6127,7 @@
                 </a:solidFill>
                 <a:latin typeface="Roboto"/>
               </a:rPr>
-              <a:t>Data retrieved 2pm, Tue 6 Oct 2026 · Generated 8 Oct 2026, 11:41pm · Sample data · Made with Python (python-pptx)</a:t>
+              <a:t>Data retrieved 2pm, Tue 6 Oct 2026 · Generated 10 Oct 2026, 9:55pm · Sample data · Made with Python (python-pptx)</a:t>
             </a:r>
           </a:p>
         </p:txBody>
